--- a/slides/BoiseCodeCamp2026.pptx
+++ b/slides/BoiseCodeCamp2026.pptx
@@ -217,7 +217,7 @@
           <a:p>
             <a:fld id="{EE3DB809-9F65-47C2-BD1A-7C89CA7E5A22}" type="datetimeFigureOut">
               <a:rPr lang="en-US" smtClean="0"/>
-              <a:t>4/24/2026</a:t>
+              <a:t>4/25/2026</a:t>
             </a:fld>
             <a:endParaRPr lang="en-US"/>
           </a:p>
@@ -6420,15 +6420,15 @@
       </p:grpSpPr>
       <p:pic>
         <p:nvPicPr>
-          <p:cNvPr id="3" name="Picture 2">
-            <a:extLst>
-              <a:ext uri="{FF2B5EF4-FFF2-40B4-BE49-F238E27FC236}">
-                <a16:creationId xmlns:a16="http://schemas.microsoft.com/office/drawing/2014/main" id="{0BBFBDC3-B8B9-84D5-20FA-EE0ACE293AB4}"/>
+          <p:cNvPr id="4" name="Picture 3">
+            <a:extLst>
+              <a:ext uri="{FF2B5EF4-FFF2-40B4-BE49-F238E27FC236}">
+                <a16:creationId xmlns:a16="http://schemas.microsoft.com/office/drawing/2014/main" id="{72D03634-4110-865B-86BB-072C635FA9BB}"/>
               </a:ext>
             </a:extLst>
           </p:cNvPr>
           <p:cNvPicPr>
-            <a:picLocks noGrp="1" noRot="1" noChangeAspect="1" noMove="1" noResize="1" noEditPoints="1" noAdjustHandles="1" noChangeArrowheads="1" noChangeShapeType="1" noCrop="1"/>
+            <a:picLocks noChangeAspect="1"/>
           </p:cNvPicPr>
           <p:nvPr/>
         </p:nvPicPr>
